--- a/assets/pptx/catalog-139.pptx
+++ b/assets/pptx/catalog-139.pptx
@@ -3391,7 +3391,7 @@
                 <a:ea typeface="Ebrima"/>
                 <a:cs typeface="Ebrima"/>
               </a:rPr>
-              <a:t>ለነፍሴ በሞት ፈንታ መዳን አውጀሃልና (2x)</a:t>
+              <a:t>ለነፍሴ በሞት ፈንታ መዳን አውጀሃልና 2x</a:t>
             </a:r>
           </a:p>
         </p:txBody>
@@ -3664,7 +3664,7 @@
                 <a:ea typeface="Ebrima"/>
                 <a:cs typeface="Ebrima"/>
               </a:rPr>
-              <a:t>አቤት አምላኬ ያደገልኝን ሳስተውለው ባረኩህ (2x)</a:t>
+              <a:t>አቤት አምላኬ ያደገልኝን ሳስተውለው ባረኩህ 2x</a:t>
             </a:r>
           </a:p>
           <a:p>
@@ -3682,7 +3682,7 @@
                 <a:ea typeface="Ebrima"/>
                 <a:cs typeface="Ebrima"/>
               </a:rPr>
-              <a:t>የእኔ ጌታ ያደረክልኝ ሳስተውሰው ወደድኩህ (2x)</a:t>
+              <a:t>የእኔ ጌታ ያደረክልኝ ሳስተውሰው ወደድኩህ 2x</a:t>
             </a:r>
           </a:p>
         </p:txBody>
@@ -3749,7 +3749,7 @@
                 <a:ea typeface="Ebrima"/>
                 <a:cs typeface="Ebrima"/>
               </a:rPr>
-              <a:t>ለካስ እንዲህ ነው (3x)</a:t>
+              <a:t>ለካስ እንዲህ ነው 3x</a:t>
             </a:r>
           </a:p>
           <a:p>
@@ -3785,7 +3785,7 @@
                 <a:ea typeface="Ebrima"/>
                 <a:cs typeface="Ebrima"/>
               </a:rPr>
-              <a:t>ለካስ እንዲህ ነው (3x)</a:t>
+              <a:t>ለካስ እንዲህ ነው 3x</a:t>
             </a:r>
           </a:p>
           <a:p>
@@ -3803,7 +3803,7 @@
                 <a:ea typeface="Ebrima"/>
                 <a:cs typeface="Ebrima"/>
               </a:rPr>
-              <a:t>ነፍሴን ያዳንካት ከሞት ነው (2x)</a:t>
+              <a:t>ነፍሴን ያዳንካት ከሞት ነው 2x</a:t>
             </a:r>
           </a:p>
         </p:txBody>
@@ -4045,7 +4045,7 @@
                 <a:ea typeface="Ebrima"/>
                 <a:cs typeface="Ebrima"/>
               </a:rPr>
-              <a:t>ሳላመነታ ሳልደናገር (2x)</a:t>
+              <a:t>ሳላመነታ ሳልደናገር 2x</a:t>
             </a:r>
           </a:p>
         </p:txBody>
@@ -4336,7 +4336,7 @@
                 <a:ea typeface="Ebrima"/>
                 <a:cs typeface="Ebrima"/>
               </a:rPr>
-              <a:t>የመኖሬ ትርጉም ሆኖ አግኝቼዋለሁ (2x)</a:t>
+              <a:t>የመኖሬ ትርጉም ሆኖ አግኝቼዋለሁ 2x</a:t>
             </a:r>
           </a:p>
         </p:txBody>
